--- a/session4/exam-strategy/q2/q2_exam_strategy.pptx
+++ b/session4/exam-strategy/q2/q2_exam_strategy.pptx
@@ -3187,8 +3187,8 @@
         </p:nvSpPr>
         <p:spPr>
           <a:xfrm>
-            <a:off x="274320" y="685800"/>
-            <a:ext cx="6400800" cy="1645920"/>
+            <a:off x="274320" y="640080"/>
+            <a:ext cx="6583680" cy="1280160"/>
           </a:xfrm>
           <a:prstGeom prst="rect">
             <a:avLst/>
@@ -3196,13 +3196,13 @@
           <a:noFill/>
         </p:spPr>
         <p:txBody>
-          <a:bodyPr wrap="square">
+          <a:bodyPr wrap="square" tIns="0" bIns="0">
             <a:spAutoFit/>
           </a:bodyPr>
           <a:lstStyle/>
           <a:p>
             <a:pPr>
-              <a:defRPr sz="1100">
+              <a:defRPr sz="900">
                 <a:solidFill>
                   <a:srgbClr val="FFFFFF"/>
                 </a:solidFill>
@@ -3210,7 +3210,7 @@
               </a:defRPr>
             </a:pPr>
             <a:r>
-              <a:t>A developer migrates a web application from an on-premises data center to the AWS Cloud. Authenticated customers use the application from many different clients simultaneously, including laptops, smartphones, and tablets. The application runs on Amazon EC2 instances behind an Application Load Balancer. The instances run in an Amazon EC2 Auto Scaling group. Upon initial testing, users report that they have to reenter information when they use the web application on their laptops and then switc...</a:t>
+              <a:t>A developer migrates a web application from an on-premises data center to the AWS Cloud. Authenticated customers use the application from many different clients simultaneously, including laptops, smartphones, and tablets. The application runs on Amazon EC2 instances behind an Application Load Balancer. The instances run in an Amazon EC2 Auto Sca...</a:t>
             </a:r>
           </a:p>
         </p:txBody>
@@ -3223,8 +3223,8 @@
         </p:nvSpPr>
         <p:spPr>
           <a:xfrm>
-            <a:off x="365760" y="2377440"/>
-            <a:ext cx="274320" cy="274320"/>
+            <a:off x="274320" y="2057400"/>
+            <a:ext cx="201168" cy="201168"/>
           </a:xfrm>
           <a:prstGeom prst="ellipse">
             <a:avLst/>
@@ -3255,7 +3255,7 @@
           <a:lstStyle/>
           <a:p>
             <a:pPr algn="ctr">
-              <a:defRPr sz="900" b="1">
+              <a:defRPr sz="700" b="1">
                 <a:solidFill>
                   <a:srgbClr val="FFFFFF"/>
                 </a:solidFill>
@@ -3275,8 +3275,8 @@
         </p:nvSpPr>
         <p:spPr>
           <a:xfrm>
-            <a:off x="777240" y="2377440"/>
-            <a:ext cx="5943600" cy="411480"/>
+            <a:off x="548640" y="2011680"/>
+            <a:ext cx="6400800" cy="736092"/>
           </a:xfrm>
           <a:prstGeom prst="rect">
             <a:avLst/>
@@ -3284,13 +3284,13 @@
           <a:noFill/>
         </p:spPr>
         <p:txBody>
-          <a:bodyPr wrap="square">
+          <a:bodyPr wrap="square" tIns="25400" bIns="0" lIns="0">
             <a:spAutoFit/>
           </a:bodyPr>
           <a:lstStyle/>
           <a:p>
             <a:pPr>
-              <a:defRPr sz="1000">
+              <a:defRPr sz="800">
                 <a:solidFill>
                   <a:srgbClr val="CCCCCC"/>
                 </a:solidFill>
@@ -3298,7 +3298,7 @@
               </a:defRPr>
             </a:pPr>
             <a:r>
-              <a:t>The sticky session feature of the Application Load Balancer does not solve the problem across devices. Sticky sessions r</a:t>
+              <a:t>The sticky session feature of the Application Load Balancer does not solve the problem across device</a:t>
             </a:r>
           </a:p>
         </p:txBody>
@@ -3311,8 +3311,8 @@
         </p:nvSpPr>
         <p:spPr>
           <a:xfrm>
-            <a:off x="365760" y="2834640"/>
-            <a:ext cx="274320" cy="274320"/>
+            <a:off x="274320" y="2811780"/>
+            <a:ext cx="201168" cy="201168"/>
           </a:xfrm>
           <a:prstGeom prst="ellipse">
             <a:avLst/>
@@ -3343,7 +3343,7 @@
           <a:lstStyle/>
           <a:p>
             <a:pPr algn="ctr">
-              <a:defRPr sz="900" b="1">
+              <a:defRPr sz="700" b="1">
                 <a:solidFill>
                   <a:srgbClr val="FFFFFF"/>
                 </a:solidFill>
@@ -3363,8 +3363,8 @@
         </p:nvSpPr>
         <p:spPr>
           <a:xfrm>
-            <a:off x="777240" y="2834640"/>
-            <a:ext cx="5943600" cy="411480"/>
+            <a:off x="548640" y="2766060"/>
+            <a:ext cx="6400800" cy="736092"/>
           </a:xfrm>
           <a:prstGeom prst="rect">
             <a:avLst/>
@@ -3372,13 +3372,13 @@
           <a:noFill/>
         </p:spPr>
         <p:txBody>
-          <a:bodyPr wrap="square">
+          <a:bodyPr wrap="square" tIns="25400" bIns="0" lIns="0">
             <a:spAutoFit/>
           </a:bodyPr>
           <a:lstStyle/>
           <a:p>
             <a:pPr>
-              <a:defRPr sz="1000">
+              <a:defRPr sz="800">
                 <a:solidFill>
                   <a:srgbClr val="CCCCCC"/>
                 </a:solidFill>
@@ -3386,7 +3386,7 @@
               </a:defRPr>
             </a:pPr>
             <a:r>
-              <a:t>ElastiCache for Redis is a fast in-memory data store that provides sub-millisecond latency to power internet-scale appli</a:t>
+              <a:t>ElastiCache for Redis is a fast in-memory data store that provides sub-millisecond latency to power </a:t>
             </a:r>
           </a:p>
         </p:txBody>
@@ -3399,8 +3399,8 @@
         </p:nvSpPr>
         <p:spPr>
           <a:xfrm>
-            <a:off x="365760" y="3291840"/>
-            <a:ext cx="274320" cy="274320"/>
+            <a:off x="274320" y="3566160"/>
+            <a:ext cx="201168" cy="201168"/>
           </a:xfrm>
           <a:prstGeom prst="ellipse">
             <a:avLst/>
@@ -3431,7 +3431,7 @@
           <a:lstStyle/>
           <a:p>
             <a:pPr algn="ctr">
-              <a:defRPr sz="900" b="1">
+              <a:defRPr sz="700" b="1">
                 <a:solidFill>
                   <a:srgbClr val="FFFFFF"/>
                 </a:solidFill>
@@ -3451,8 +3451,8 @@
         </p:nvSpPr>
         <p:spPr>
           <a:xfrm>
-            <a:off x="777240" y="3291840"/>
-            <a:ext cx="5943600" cy="411480"/>
+            <a:off x="548640" y="3520440"/>
+            <a:ext cx="6400800" cy="736092"/>
           </a:xfrm>
           <a:prstGeom prst="rect">
             <a:avLst/>
@@ -3460,13 +3460,13 @@
           <a:noFill/>
         </p:spPr>
         <p:txBody>
-          <a:bodyPr wrap="square">
+          <a:bodyPr wrap="square" tIns="25400" bIns="0" lIns="0">
             <a:spAutoFit/>
           </a:bodyPr>
           <a:lstStyle/>
           <a:p>
             <a:pPr>
-              <a:defRPr sz="1000">
+              <a:defRPr sz="800">
                 <a:solidFill>
                   <a:srgbClr val="CCCCCC"/>
                 </a:solidFill>
@@ -3474,7 +3474,7 @@
               </a:defRPr>
             </a:pPr>
             <a:r>
-              <a:t>A local file could store session state information persistently over time, but this does not solve the problem presented</a:t>
+              <a:t>A local file could store session state information persistently over time, but this does not solve t</a:t>
             </a:r>
           </a:p>
         </p:txBody>
@@ -3487,8 +3487,8 @@
         </p:nvSpPr>
         <p:spPr>
           <a:xfrm>
-            <a:off x="365760" y="3749039"/>
-            <a:ext cx="274320" cy="274320"/>
+            <a:off x="274320" y="4320540"/>
+            <a:ext cx="201168" cy="201168"/>
           </a:xfrm>
           <a:prstGeom prst="ellipse">
             <a:avLst/>
@@ -3519,7 +3519,7 @@
           <a:lstStyle/>
           <a:p>
             <a:pPr algn="ctr">
-              <a:defRPr sz="900" b="1">
+              <a:defRPr sz="700" b="1">
                 <a:solidFill>
                   <a:srgbClr val="FFFFFF"/>
                 </a:solidFill>
@@ -3539,8 +3539,8 @@
         </p:nvSpPr>
         <p:spPr>
           <a:xfrm>
-            <a:off x="777240" y="3749039"/>
-            <a:ext cx="5943600" cy="411480"/>
+            <a:off x="548640" y="4274820"/>
+            <a:ext cx="6400800" cy="736092"/>
           </a:xfrm>
           <a:prstGeom prst="rect">
             <a:avLst/>
@@ -3548,13 +3548,13 @@
           <a:noFill/>
         </p:spPr>
         <p:txBody>
-          <a:bodyPr wrap="square">
+          <a:bodyPr wrap="square" tIns="25400" bIns="0" lIns="0">
             <a:spAutoFit/>
           </a:bodyPr>
           <a:lstStyle/>
           <a:p>
             <a:pPr>
-              <a:defRPr sz="1000">
+              <a:defRPr sz="800">
                 <a:solidFill>
                   <a:srgbClr val="CCCCCC"/>
                 </a:solidFill>
@@ -3562,7 +3562,7 @@
               </a:defRPr>
             </a:pPr>
             <a:r>
-              <a:t>Systems Manager State Manager is not for use of session state information management. Systems Manager State Manager is u</a:t>
+              <a:t>Systems Manager State Manager is not for use of session state information management. Systems Manage</a:t>
             </a:r>
           </a:p>
         </p:txBody>
@@ -3845,7 +3845,7 @@
         <p:spPr>
           <a:xfrm>
             <a:off x="182880" y="914400"/>
-            <a:ext cx="5280660" cy="3840480"/>
+            <a:ext cx="4625457" cy="3840480"/>
           </a:xfrm>
           <a:prstGeom prst="rect">
             <a:avLst/>
@@ -3980,9 +3980,9 @@
           <a:p>
             <a:pPr>
               <a:spcAft>
-                <a:spcPts val="600"/>
+                <a:spcPts val="400"/>
               </a:spcAft>
-              <a:defRPr sz="900">
+              <a:defRPr sz="800">
                 <a:solidFill>
                   <a:srgbClr val="212121"/>
                 </a:solidFill>
@@ -3990,15 +3990,15 @@
               </a:defRPr>
             </a:pPr>
             <a:r>
-              <a:t>• The sticky session feature of the Application Load Balancer does not solve the problem across devices.</a:t>
+              <a:t>• The sticky session feature of the Application Load Balancer does not solve the problem across devices</a:t>
             </a:r>
           </a:p>
           <a:p>
             <a:pPr>
               <a:spcAft>
-                <a:spcPts val="600"/>
+                <a:spcPts val="400"/>
               </a:spcAft>
-              <a:defRPr sz="900">
+              <a:defRPr sz="800">
                 <a:solidFill>
                   <a:srgbClr val="212121"/>
                 </a:solidFill>
@@ -4006,7 +4006,7 @@
               </a:defRPr>
             </a:pPr>
             <a:r>
-              <a:t>• Sticky sessions rely on a cookie that is not going to be consistent across devices.</a:t>
+              <a:t>• Sticky sessions rely on a cookie that is not going to be consistent across devices</a:t>
             </a:r>
           </a:p>
         </p:txBody>
@@ -4185,8 +4185,8 @@
         </p:blipFill>
         <p:spPr>
           <a:xfrm>
-            <a:off x="182880" y="1466854"/>
-            <a:ext cx="5303520" cy="2735570"/>
+            <a:off x="182880" y="1440242"/>
+            <a:ext cx="5303520" cy="2788795"/>
           </a:xfrm>
           <a:prstGeom prst="rect">
             <a:avLst/>
@@ -4321,9 +4321,9 @@
           <a:p>
             <a:pPr>
               <a:spcAft>
-                <a:spcPts val="600"/>
+                <a:spcPts val="400"/>
               </a:spcAft>
-              <a:defRPr sz="900">
+              <a:defRPr sz="800">
                 <a:solidFill>
                   <a:srgbClr val="212121"/>
                 </a:solidFill>
@@ -4331,15 +4331,15 @@
               </a:defRPr>
             </a:pPr>
             <a:r>
-              <a:t>• ElastiCache for Redis is a fast in-memory data store that provides sub-millisecond latency to power internet-scale applications in real time.</a:t>
+              <a:t>• ElastiCache for Redis is a fast in-memory data store that provides sub-millisecond latency to power internet-scale applications in real time</a:t>
             </a:r>
           </a:p>
           <a:p>
             <a:pPr>
               <a:spcAft>
-                <a:spcPts val="600"/>
+                <a:spcPts val="400"/>
               </a:spcAft>
-              <a:defRPr sz="900">
+              <a:defRPr sz="800">
                 <a:solidFill>
                   <a:srgbClr val="212121"/>
                 </a:solidFill>
@@ -4347,15 +4347,15 @@
               </a:defRPr>
             </a:pPr>
             <a:r>
-              <a:t>• The data will not be stored on the instance itself.</a:t>
+              <a:t>• The data will not be stored on the instance itself</a:t>
             </a:r>
           </a:p>
           <a:p>
             <a:pPr>
               <a:spcAft>
-                <a:spcPts val="600"/>
+                <a:spcPts val="400"/>
               </a:spcAft>
-              <a:defRPr sz="900">
+              <a:defRPr sz="800">
                 <a:solidFill>
                   <a:srgbClr val="212121"/>
                 </a:solidFill>
@@ -4363,7 +4363,7 @@
               </a:defRPr>
             </a:pPr>
             <a:r>
-              <a:t>• This choice is ideal for ensuring that the session state information persists across devices.</a:t>
+              <a:t>• This choice is ideal for ensuring that the session state information persists across devices</a:t>
             </a:r>
           </a:p>
         </p:txBody>
@@ -4543,7 +4543,7 @@
         <p:spPr>
           <a:xfrm>
             <a:off x="182880" y="914400"/>
-            <a:ext cx="5280660" cy="3840480"/>
+            <a:ext cx="3706301" cy="3840480"/>
           </a:xfrm>
           <a:prstGeom prst="rect">
             <a:avLst/>
@@ -4678,9 +4678,9 @@
           <a:p>
             <a:pPr>
               <a:spcAft>
-                <a:spcPts val="600"/>
+                <a:spcPts val="400"/>
               </a:spcAft>
-              <a:defRPr sz="900">
+              <a:defRPr sz="800">
                 <a:solidFill>
                   <a:srgbClr val="212121"/>
                 </a:solidFill>
@@ -4688,15 +4688,15 @@
               </a:defRPr>
             </a:pPr>
             <a:r>
-              <a:t>• A local file could store session state information persistently over time, but this does not solve the problem presented.</a:t>
+              <a:t>• A local file could store session state information persistently over time</a:t>
             </a:r>
           </a:p>
           <a:p>
             <a:pPr>
               <a:spcAft>
-                <a:spcPts val="600"/>
+                <a:spcPts val="400"/>
               </a:spcAft>
-              <a:defRPr sz="900">
+              <a:defRPr sz="800">
                 <a:solidFill>
                   <a:srgbClr val="212121"/>
                 </a:solidFill>
@@ -4704,7 +4704,39 @@
               </a:defRPr>
             </a:pPr>
             <a:r>
-              <a:t>• If session state information is stored locally on the instance when a request is sent to another node behind the Application Load Balancer, the other node does not have access to the session state information.</a:t>
+              <a:t>• But this does not solve the problem presented</a:t>
+            </a:r>
+          </a:p>
+          <a:p>
+            <a:pPr>
+              <a:spcAft>
+                <a:spcPts val="400"/>
+              </a:spcAft>
+              <a:defRPr sz="800">
+                <a:solidFill>
+                  <a:srgbClr val="212121"/>
+                </a:solidFill>
+                <a:latin typeface="Segoe UI"/>
+              </a:defRPr>
+            </a:pPr>
+            <a:r>
+              <a:t>• If session state information is stored locally on the instance when a request is sent to another node behind the Application Load Balancer</a:t>
+            </a:r>
+          </a:p>
+          <a:p>
+            <a:pPr>
+              <a:spcAft>
+                <a:spcPts val="400"/>
+              </a:spcAft>
+              <a:defRPr sz="800">
+                <a:solidFill>
+                  <a:srgbClr val="212121"/>
+                </a:solidFill>
+                <a:latin typeface="Segoe UI"/>
+              </a:defRPr>
+            </a:pPr>
+            <a:r>
+              <a:t>• The other node does not have access to the session state information</a:t>
             </a:r>
           </a:p>
         </p:txBody>
@@ -4883,8 +4915,8 @@
         </p:blipFill>
         <p:spPr>
           <a:xfrm>
-            <a:off x="182880" y="1466854"/>
-            <a:ext cx="5303520" cy="2735570"/>
+            <a:off x="182880" y="1241496"/>
+            <a:ext cx="5303520" cy="3186287"/>
           </a:xfrm>
           <a:prstGeom prst="rect">
             <a:avLst/>
@@ -5019,9 +5051,9 @@
           <a:p>
             <a:pPr>
               <a:spcAft>
-                <a:spcPts val="600"/>
+                <a:spcPts val="400"/>
               </a:spcAft>
-              <a:defRPr sz="900">
+              <a:defRPr sz="800">
                 <a:solidFill>
                   <a:srgbClr val="212121"/>
                 </a:solidFill>
@@ -5029,15 +5061,15 @@
               </a:defRPr>
             </a:pPr>
             <a:r>
-              <a:t>• Systems Manager State Manager is not for use of session state information management.</a:t>
+              <a:t>• Systems Manager State Manager is not for use of session state information management</a:t>
             </a:r>
           </a:p>
           <a:p>
             <a:pPr>
               <a:spcAft>
-                <a:spcPts val="600"/>
+                <a:spcPts val="400"/>
               </a:spcAft>
-              <a:defRPr sz="900">
+              <a:defRPr sz="800">
                 <a:solidFill>
                   <a:srgbClr val="212121"/>
                 </a:solidFill>
@@ -5045,7 +5077,23 @@
               </a:defRPr>
             </a:pPr>
             <a:r>
-              <a:t>• Systems Manager State Manager is used to manage the state of an instance itself, such as specific instance configurations or software installations.</a:t>
+              <a:t>• Systems Manager State Manager is used to manage the state of an instance itself</a:t>
+            </a:r>
+          </a:p>
+          <a:p>
+            <a:pPr>
+              <a:spcAft>
+                <a:spcPts val="400"/>
+              </a:spcAft>
+              <a:defRPr sz="800">
+                <a:solidFill>
+                  <a:srgbClr val="212121"/>
+                </a:solidFill>
+                <a:latin typeface="Segoe UI"/>
+              </a:defRPr>
+            </a:pPr>
+            <a:r>
+              <a:t>• Such as specific instance configurations or software installations</a:t>
             </a:r>
           </a:p>
         </p:txBody>

--- a/session4/exam-strategy/q2/q2_exam_strategy.pptx
+++ b/session4/exam-strategy/q2/q2_exam_strategy.pptx
@@ -3187,8 +3187,8 @@
         </p:nvSpPr>
         <p:spPr>
           <a:xfrm>
-            <a:off x="274320" y="640080"/>
-            <a:ext cx="6583680" cy="1280160"/>
+            <a:off x="274320" y="685800"/>
+            <a:ext cx="6400800" cy="1645920"/>
           </a:xfrm>
           <a:prstGeom prst="rect">
             <a:avLst/>
@@ -3196,13 +3196,13 @@
           <a:noFill/>
         </p:spPr>
         <p:txBody>
-          <a:bodyPr wrap="square" tIns="0" bIns="0">
+          <a:bodyPr wrap="square">
             <a:spAutoFit/>
           </a:bodyPr>
           <a:lstStyle/>
           <a:p>
             <a:pPr>
-              <a:defRPr sz="900">
+              <a:defRPr sz="1100">
                 <a:solidFill>
                   <a:srgbClr val="FFFFFF"/>
                 </a:solidFill>
@@ -3210,7 +3210,7 @@
               </a:defRPr>
             </a:pPr>
             <a:r>
-              <a:t>A developer migrates a web application from an on-premises data center to the AWS Cloud. Authenticated customers use the application from many different clients simultaneously, including laptops, smartphones, and tablets. The application runs on Amazon EC2 instances behind an Application Load Balancer. The instances run in an Amazon EC2 Auto Sca...</a:t>
+              <a:t>A developer migrates a web application from an on-premises data center to the AWS Cloud. Authenticated customers use the application from many different clients simultaneously, including laptops, smartphones, and tablets. The application runs on Amazon EC2 instances behind an Application Load Balancer. The instances run in an Amazon EC2 Auto Scaling group. Upon initial testing, users report that they have to reenter information when they use the web application on their laptops and then switc...</a:t>
             </a:r>
           </a:p>
         </p:txBody>
@@ -3223,8 +3223,8 @@
         </p:nvSpPr>
         <p:spPr>
           <a:xfrm>
-            <a:off x="274320" y="2057400"/>
-            <a:ext cx="201168" cy="201168"/>
+            <a:off x="365760" y="2377440"/>
+            <a:ext cx="274320" cy="274320"/>
           </a:xfrm>
           <a:prstGeom prst="ellipse">
             <a:avLst/>
@@ -3255,7 +3255,7 @@
           <a:lstStyle/>
           <a:p>
             <a:pPr algn="ctr">
-              <a:defRPr sz="700" b="1">
+              <a:defRPr sz="900" b="1">
                 <a:solidFill>
                   <a:srgbClr val="FFFFFF"/>
                 </a:solidFill>
@@ -3275,8 +3275,8 @@
         </p:nvSpPr>
         <p:spPr>
           <a:xfrm>
-            <a:off x="548640" y="2011680"/>
-            <a:ext cx="6400800" cy="736092"/>
+            <a:off x="777240" y="2377440"/>
+            <a:ext cx="5943600" cy="411480"/>
           </a:xfrm>
           <a:prstGeom prst="rect">
             <a:avLst/>
@@ -3284,13 +3284,13 @@
           <a:noFill/>
         </p:spPr>
         <p:txBody>
-          <a:bodyPr wrap="square" tIns="25400" bIns="0" lIns="0">
+          <a:bodyPr wrap="square">
             <a:spAutoFit/>
           </a:bodyPr>
           <a:lstStyle/>
           <a:p>
             <a:pPr>
-              <a:defRPr sz="800">
+              <a:defRPr sz="1000">
                 <a:solidFill>
                   <a:srgbClr val="CCCCCC"/>
                 </a:solidFill>
@@ -3298,7 +3298,7 @@
               </a:defRPr>
             </a:pPr>
             <a:r>
-              <a:t>The sticky session feature of the Application Load Balancer does not solve the problem across device</a:t>
+              <a:t>The sticky session feature of the Application Load Balancer does not solve the problem across devices. Sticky sessions r</a:t>
             </a:r>
           </a:p>
         </p:txBody>
@@ -3311,8 +3311,8 @@
         </p:nvSpPr>
         <p:spPr>
           <a:xfrm>
-            <a:off x="274320" y="2811780"/>
-            <a:ext cx="201168" cy="201168"/>
+            <a:off x="365760" y="2834640"/>
+            <a:ext cx="274320" cy="274320"/>
           </a:xfrm>
           <a:prstGeom prst="ellipse">
             <a:avLst/>
@@ -3343,7 +3343,7 @@
           <a:lstStyle/>
           <a:p>
             <a:pPr algn="ctr">
-              <a:defRPr sz="700" b="1">
+              <a:defRPr sz="900" b="1">
                 <a:solidFill>
                   <a:srgbClr val="FFFFFF"/>
                 </a:solidFill>
@@ -3363,8 +3363,8 @@
         </p:nvSpPr>
         <p:spPr>
           <a:xfrm>
-            <a:off x="548640" y="2766060"/>
-            <a:ext cx="6400800" cy="736092"/>
+            <a:off x="777240" y="2834640"/>
+            <a:ext cx="5943600" cy="411480"/>
           </a:xfrm>
           <a:prstGeom prst="rect">
             <a:avLst/>
@@ -3372,13 +3372,13 @@
           <a:noFill/>
         </p:spPr>
         <p:txBody>
-          <a:bodyPr wrap="square" tIns="25400" bIns="0" lIns="0">
+          <a:bodyPr wrap="square">
             <a:spAutoFit/>
           </a:bodyPr>
           <a:lstStyle/>
           <a:p>
             <a:pPr>
-              <a:defRPr sz="800">
+              <a:defRPr sz="1000">
                 <a:solidFill>
                   <a:srgbClr val="CCCCCC"/>
                 </a:solidFill>
@@ -3386,7 +3386,7 @@
               </a:defRPr>
             </a:pPr>
             <a:r>
-              <a:t>ElastiCache for Redis is a fast in-memory data store that provides sub-millisecond latency to power </a:t>
+              <a:t>ElastiCache for Redis is a fast in-memory data store that provides sub-millisecond latency to power internet-scale appli</a:t>
             </a:r>
           </a:p>
         </p:txBody>
@@ -3399,8 +3399,8 @@
         </p:nvSpPr>
         <p:spPr>
           <a:xfrm>
-            <a:off x="274320" y="3566160"/>
-            <a:ext cx="201168" cy="201168"/>
+            <a:off x="365760" y="3291840"/>
+            <a:ext cx="274320" cy="274320"/>
           </a:xfrm>
           <a:prstGeom prst="ellipse">
             <a:avLst/>
@@ -3431,7 +3431,7 @@
           <a:lstStyle/>
           <a:p>
             <a:pPr algn="ctr">
-              <a:defRPr sz="700" b="1">
+              <a:defRPr sz="900" b="1">
                 <a:solidFill>
                   <a:srgbClr val="FFFFFF"/>
                 </a:solidFill>
@@ -3451,8 +3451,8 @@
         </p:nvSpPr>
         <p:spPr>
           <a:xfrm>
-            <a:off x="548640" y="3520440"/>
-            <a:ext cx="6400800" cy="736092"/>
+            <a:off x="777240" y="3291840"/>
+            <a:ext cx="5943600" cy="411480"/>
           </a:xfrm>
           <a:prstGeom prst="rect">
             <a:avLst/>
@@ -3460,13 +3460,13 @@
           <a:noFill/>
         </p:spPr>
         <p:txBody>
-          <a:bodyPr wrap="square" tIns="25400" bIns="0" lIns="0">
+          <a:bodyPr wrap="square">
             <a:spAutoFit/>
           </a:bodyPr>
           <a:lstStyle/>
           <a:p>
             <a:pPr>
-              <a:defRPr sz="800">
+              <a:defRPr sz="1000">
                 <a:solidFill>
                   <a:srgbClr val="CCCCCC"/>
                 </a:solidFill>
@@ -3474,7 +3474,7 @@
               </a:defRPr>
             </a:pPr>
             <a:r>
-              <a:t>A local file could store session state information persistently over time, but this does not solve t</a:t>
+              <a:t>A local file could store session state information persistently over time, but this does not solve the problem presented</a:t>
             </a:r>
           </a:p>
         </p:txBody>
@@ -3487,8 +3487,8 @@
         </p:nvSpPr>
         <p:spPr>
           <a:xfrm>
-            <a:off x="274320" y="4320540"/>
-            <a:ext cx="201168" cy="201168"/>
+            <a:off x="365760" y="3749039"/>
+            <a:ext cx="274320" cy="274320"/>
           </a:xfrm>
           <a:prstGeom prst="ellipse">
             <a:avLst/>
@@ -3519,7 +3519,7 @@
           <a:lstStyle/>
           <a:p>
             <a:pPr algn="ctr">
-              <a:defRPr sz="700" b="1">
+              <a:defRPr sz="900" b="1">
                 <a:solidFill>
                   <a:srgbClr val="FFFFFF"/>
                 </a:solidFill>
@@ -3539,8 +3539,8 @@
         </p:nvSpPr>
         <p:spPr>
           <a:xfrm>
-            <a:off x="548640" y="4274820"/>
-            <a:ext cx="6400800" cy="736092"/>
+            <a:off x="777240" y="3749039"/>
+            <a:ext cx="5943600" cy="411480"/>
           </a:xfrm>
           <a:prstGeom prst="rect">
             <a:avLst/>
@@ -3548,13 +3548,13 @@
           <a:noFill/>
         </p:spPr>
         <p:txBody>
-          <a:bodyPr wrap="square" tIns="25400" bIns="0" lIns="0">
+          <a:bodyPr wrap="square">
             <a:spAutoFit/>
           </a:bodyPr>
           <a:lstStyle/>
           <a:p>
             <a:pPr>
-              <a:defRPr sz="800">
+              <a:defRPr sz="1000">
                 <a:solidFill>
                   <a:srgbClr val="CCCCCC"/>
                 </a:solidFill>
@@ -3562,7 +3562,7 @@
               </a:defRPr>
             </a:pPr>
             <a:r>
-              <a:t>Systems Manager State Manager is not for use of session state information management. Systems Manage</a:t>
+              <a:t>Systems Manager State Manager is not for use of session state information management. Systems Manager State Manager is u</a:t>
             </a:r>
           </a:p>
         </p:txBody>
@@ -3844,8 +3844,8 @@
         </p:blipFill>
         <p:spPr>
           <a:xfrm>
-            <a:off x="182880" y="914400"/>
-            <a:ext cx="4625457" cy="3840480"/>
+            <a:off x="182880" y="974130"/>
+            <a:ext cx="5303520" cy="3721018"/>
           </a:xfrm>
           <a:prstGeom prst="rect">
             <a:avLst/>
@@ -3980,9 +3980,9 @@
           <a:p>
             <a:pPr>
               <a:spcAft>
-                <a:spcPts val="400"/>
+                <a:spcPts val="600"/>
               </a:spcAft>
-              <a:defRPr sz="800">
+              <a:defRPr sz="900">
                 <a:solidFill>
                   <a:srgbClr val="212121"/>
                 </a:solidFill>
@@ -3990,15 +3990,15 @@
               </a:defRPr>
             </a:pPr>
             <a:r>
-              <a:t>• The sticky session feature of the Application Load Balancer does not solve the problem across devices</a:t>
+              <a:t>• The sticky session feature of the Application Load Balancer does not solve the problem across devices.</a:t>
             </a:r>
           </a:p>
           <a:p>
             <a:pPr>
               <a:spcAft>
-                <a:spcPts val="400"/>
+                <a:spcPts val="600"/>
               </a:spcAft>
-              <a:defRPr sz="800">
+              <a:defRPr sz="900">
                 <a:solidFill>
                   <a:srgbClr val="212121"/>
                 </a:solidFill>
@@ -4006,7 +4006,7 @@
               </a:defRPr>
             </a:pPr>
             <a:r>
-              <a:t>• Sticky sessions rely on a cookie that is not going to be consistent across devices</a:t>
+              <a:t>• Sticky sessions rely on a cookie that is not going to be consistent across devices.</a:t>
             </a:r>
           </a:p>
         </p:txBody>
@@ -4185,8 +4185,8 @@
         </p:blipFill>
         <p:spPr>
           <a:xfrm>
-            <a:off x="182880" y="1440242"/>
-            <a:ext cx="5303520" cy="2788795"/>
+            <a:off x="182880" y="1281789"/>
+            <a:ext cx="5303520" cy="3105701"/>
           </a:xfrm>
           <a:prstGeom prst="rect">
             <a:avLst/>
@@ -4321,9 +4321,9 @@
           <a:p>
             <a:pPr>
               <a:spcAft>
-                <a:spcPts val="400"/>
+                <a:spcPts val="600"/>
               </a:spcAft>
-              <a:defRPr sz="800">
+              <a:defRPr sz="900">
                 <a:solidFill>
                   <a:srgbClr val="212121"/>
                 </a:solidFill>
@@ -4331,15 +4331,15 @@
               </a:defRPr>
             </a:pPr>
             <a:r>
-              <a:t>• ElastiCache for Redis is a fast in-memory data store that provides sub-millisecond latency to power internet-scale applications in real time</a:t>
+              <a:t>• ElastiCache for Redis is a fast in-memory data store that provides sub-millisecond latency to power internet-scale applications in real time.</a:t>
             </a:r>
           </a:p>
           <a:p>
             <a:pPr>
               <a:spcAft>
-                <a:spcPts val="400"/>
+                <a:spcPts val="600"/>
               </a:spcAft>
-              <a:defRPr sz="800">
+              <a:defRPr sz="900">
                 <a:solidFill>
                   <a:srgbClr val="212121"/>
                 </a:solidFill>
@@ -4347,15 +4347,15 @@
               </a:defRPr>
             </a:pPr>
             <a:r>
-              <a:t>• The data will not be stored on the instance itself</a:t>
+              <a:t>• The data will not be stored on the instance itself.</a:t>
             </a:r>
           </a:p>
           <a:p>
             <a:pPr>
               <a:spcAft>
-                <a:spcPts val="400"/>
+                <a:spcPts val="600"/>
               </a:spcAft>
-              <a:defRPr sz="800">
+              <a:defRPr sz="900">
                 <a:solidFill>
                   <a:srgbClr val="212121"/>
                 </a:solidFill>
@@ -4363,7 +4363,7 @@
               </a:defRPr>
             </a:pPr>
             <a:r>
-              <a:t>• This choice is ideal for ensuring that the session state information persists across devices</a:t>
+              <a:t>• This choice is ideal for ensuring that the session state information persists across devices.</a:t>
             </a:r>
           </a:p>
         </p:txBody>
@@ -4543,7 +4543,7 @@
         <p:spPr>
           <a:xfrm>
             <a:off x="182880" y="914400"/>
-            <a:ext cx="3706301" cy="3840480"/>
+            <a:ext cx="4068950" cy="3840480"/>
           </a:xfrm>
           <a:prstGeom prst="rect">
             <a:avLst/>
@@ -4678,9 +4678,9 @@
           <a:p>
             <a:pPr>
               <a:spcAft>
-                <a:spcPts val="400"/>
+                <a:spcPts val="600"/>
               </a:spcAft>
-              <a:defRPr sz="800">
+              <a:defRPr sz="900">
                 <a:solidFill>
                   <a:srgbClr val="212121"/>
                 </a:solidFill>
@@ -4688,15 +4688,15 @@
               </a:defRPr>
             </a:pPr>
             <a:r>
-              <a:t>• A local file could store session state information persistently over time</a:t>
+              <a:t>• A local file could store session state information persistently over time, but this does not solve the problem presented.</a:t>
             </a:r>
           </a:p>
           <a:p>
             <a:pPr>
               <a:spcAft>
-                <a:spcPts val="400"/>
+                <a:spcPts val="600"/>
               </a:spcAft>
-              <a:defRPr sz="800">
+              <a:defRPr sz="900">
                 <a:solidFill>
                   <a:srgbClr val="212121"/>
                 </a:solidFill>
@@ -4704,39 +4704,7 @@
               </a:defRPr>
             </a:pPr>
             <a:r>
-              <a:t>• But this does not solve the problem presented</a:t>
-            </a:r>
-          </a:p>
-          <a:p>
-            <a:pPr>
-              <a:spcAft>
-                <a:spcPts val="400"/>
-              </a:spcAft>
-              <a:defRPr sz="800">
-                <a:solidFill>
-                  <a:srgbClr val="212121"/>
-                </a:solidFill>
-                <a:latin typeface="Segoe UI"/>
-              </a:defRPr>
-            </a:pPr>
-            <a:r>
-              <a:t>• If session state information is stored locally on the instance when a request is sent to another node behind the Application Load Balancer</a:t>
-            </a:r>
-          </a:p>
-          <a:p>
-            <a:pPr>
-              <a:spcAft>
-                <a:spcPts val="400"/>
-              </a:spcAft>
-              <a:defRPr sz="800">
-                <a:solidFill>
-                  <a:srgbClr val="212121"/>
-                </a:solidFill>
-                <a:latin typeface="Segoe UI"/>
-              </a:defRPr>
-            </a:pPr>
-            <a:r>
-              <a:t>• The other node does not have access to the session state information</a:t>
+              <a:t>• If session state information is stored locally on the instance when a request is sent to another node behind the Application Load Balancer, the other node does not have access to the session state information.</a:t>
             </a:r>
           </a:p>
         </p:txBody>
@@ -4915,8 +4883,8 @@
         </p:blipFill>
         <p:spPr>
           <a:xfrm>
-            <a:off x="182880" y="1241496"/>
-            <a:ext cx="5303520" cy="3186287"/>
+            <a:off x="182880" y="1824843"/>
+            <a:ext cx="5303520" cy="2019593"/>
           </a:xfrm>
           <a:prstGeom prst="rect">
             <a:avLst/>
@@ -5051,9 +5019,9 @@
           <a:p>
             <a:pPr>
               <a:spcAft>
-                <a:spcPts val="400"/>
+                <a:spcPts val="600"/>
               </a:spcAft>
-              <a:defRPr sz="800">
+              <a:defRPr sz="900">
                 <a:solidFill>
                   <a:srgbClr val="212121"/>
                 </a:solidFill>
@@ -5061,15 +5029,15 @@
               </a:defRPr>
             </a:pPr>
             <a:r>
-              <a:t>• Systems Manager State Manager is not for use of session state information management</a:t>
+              <a:t>• Systems Manager State Manager is not for use of session state information management.</a:t>
             </a:r>
           </a:p>
           <a:p>
             <a:pPr>
               <a:spcAft>
-                <a:spcPts val="400"/>
+                <a:spcPts val="600"/>
               </a:spcAft>
-              <a:defRPr sz="800">
+              <a:defRPr sz="900">
                 <a:solidFill>
                   <a:srgbClr val="212121"/>
                 </a:solidFill>
@@ -5077,23 +5045,7 @@
               </a:defRPr>
             </a:pPr>
             <a:r>
-              <a:t>• Systems Manager State Manager is used to manage the state of an instance itself</a:t>
-            </a:r>
-          </a:p>
-          <a:p>
-            <a:pPr>
-              <a:spcAft>
-                <a:spcPts val="400"/>
-              </a:spcAft>
-              <a:defRPr sz="800">
-                <a:solidFill>
-                  <a:srgbClr val="212121"/>
-                </a:solidFill>
-                <a:latin typeface="Segoe UI"/>
-              </a:defRPr>
-            </a:pPr>
-            <a:r>
-              <a:t>• Such as specific instance configurations or software installations</a:t>
+              <a:t>• Systems Manager State Manager is used to manage the state of an instance itself, such as specific instance configurations or software installations.</a:t>
             </a:r>
           </a:p>
         </p:txBody>
